--- a/deck/Tech4Food_Final_SaafScan.pptx
+++ b/deck/Tech4Food_Final_SaafScan.pptx
@@ -2555,7 +2555,7 @@
           <a:lstStyle/>
           <a:p>
             <a:r>
-              <a:t>Close on the honest limit rather than hiding it. The organisers asked for a solution that works, so the strongest thing to say is that the software is finished and tested, the imaging half has been validated against photographed printed targets, and real strips were captured on 23 October with the model retrained on them. Do not claim the ML beats the rule table: the rule table scores 1.000 on the held-out split and the model scores 0.933, a delta of -0.067, so it ships on artifact size and abstention headroom instead.</a:t>
+              <a:t>Close on the honest limit rather than hiding it. The software is finished and tested, and the imaging half has been validated against photographed printed targets: every frame cleared every detector gate, and control-zone drift on one frame reached 46.3 against a 45 tolerance, so the pipeline refused it rather than diagnosing from an untrustworthy control. That refusal is the project's core principle working on real camera input, not on a rendering. The 23 October reagent shoot found both stocks past date, so no chemistry was run. If asked why we did not simply run them: expired iodine gives false negatives, and methylene blue that has already reduced reads colourless, which is exactly what a detergent positive looks like, so every result would have been uninterpretable. Do not claim the ML beats the rule table: the rule table scores 1.000 on the held-out split and the model scores 0.933, a delta of -0.067, so it ships on artifact size and abstention headroom instead.</a:t>
             </a:r>
           </a:p>
         </p:txBody>
@@ -14233,7 +14233,7 @@
                 </a:solidFill>
                 <a:latin typeface="DM Sans"/>
               </a:rPr>
-              <a:t>23 Oct real strips captured and the model retrained · 24 Oct final, live on real reagents.</a:t>
+              <a:t>23 Oct reagent shoot attempted, both stocks past date · 24 Oct final, live and offline.</a:t>
             </a:r>
           </a:p>
         </p:txBody>
@@ -15030,7 +15030,7 @@
                 </a:solidFill>
                 <a:latin typeface="DM Sans"/>
               </a:rPr>
-              <a:t>534 synthetic strip images across 5 lighting conditions, plus printed colour targets photographed to validate the imaging half before any chemistry. Real iodine and methylene-blue strips captured 23 October, the night before the final.</a:t>
+              <a:t>534 synthetic strip images across 5 lighting conditions, plus printed colour targets photographed to validate the imaging half before any chemistry. A real-reagent shoot was attempted 23 October; both stocks were past date, so no chemistry was run.</a:t>
             </a:r>
           </a:p>
         </p:txBody>
@@ -16262,7 +16262,7 @@
                 </a:solidFill>
                 <a:latin typeface="DM Sans"/>
               </a:rPr>
-              <a:t>Colour thresholds are validated on synthetic reagent scenes, not yet on real chemistry. The 24 October final runs on real iodine and methylene-blue strips and the model is retrained on those photos first. A reading is a screening signal, not a legal test result.</a:t>
+              <a:t>The classifier is validated on synthetic reagent scenes, not real chemistry. A 23 October shoot found both stocks past date: degraded iodine gives false negatives, and reduced methylene blue reads colourless, which is what a positive looks like. Running them would have yielded results we could not separate from our own failure modes, so imaging was validated against printed targets instead. A reading is a screening signal, not a legal test result.</a:t>
             </a:r>
           </a:p>
         </p:txBody>
@@ -16726,7 +16726,7 @@
                 </a:solidFill>
                 <a:latin typeface="DM Sans"/>
               </a:rPr>
-              <a:t>Real strips captured, model retrained, full rehearsal</a:t>
+              <a:t>Reagent shoot attempted, both stocks past date, rehearsal</a:t>
             </a:r>
           </a:p>
         </p:txBody>
@@ -16869,7 +16869,7 @@
                 </a:solidFill>
                 <a:latin typeface="DM Sans"/>
               </a:rPr>
-              <a:t>Final, 09:00-12:00 at PCCOE, live on real reagents</a:t>
+              <a:t>Final, 09:00-12:00 at PCCOE, live demo, offline</a:t>
             </a:r>
           </a:p>
         </p:txBody>
